--- a/Курс 3/DevOps/ИД23-1_МасловАН_Отчёт по проекту.pptx
+++ b/Курс 3/DevOps/ИД23-1_МасловАН_Отчёт по проекту.pptx
@@ -13354,7 +13354,7 @@
                 <a:ea typeface="Gungsuh" panose="02030600000101010101" pitchFamily="18" charset="-127"/>
                 <a:cs typeface="Helvetica" pitchFamily="34" charset="0"/>
               </a:rPr>
-              <a:t>КУРСОВОЙ ПРОЕКТ</a:t>
+              <a:t>ПРАКТИЧЕСКАЯ РАБОТА</a:t>
             </a:r>
             <a:br>
               <a:rPr lang="en-US" sz="3000" b="1" dirty="0">
@@ -13369,7 +13369,7 @@
                 <a:ea typeface="Gungsuh" panose="02030600000101010101" pitchFamily="18" charset="-127"/>
                 <a:cs typeface="Helvetica" pitchFamily="34" charset="0"/>
               </a:rPr>
-              <a:t>Информационно справочная система издательского дома</a:t>
+              <a:t>Разработка программного контейнера защиты приложения от угрозы использования скомпрометированного доверенного источника обновлений</a:t>
             </a:r>
             <a:endParaRPr lang="ru-RU" sz="3000" b="1" dirty="0">
               <a:solidFill>
@@ -13457,7 +13457,27 @@
                 <a:latin typeface="Helvetica" pitchFamily="34" charset="0"/>
                 <a:cs typeface="Helvetica" pitchFamily="34" charset="0"/>
               </a:rPr>
-              <a:t>Руководитель: Гринева Н.В</a:t>
+              <a:t>Проверил</a:t>
+            </a:r>
+            <a:r>
+              <a:rPr lang="ru-RU" sz="1800" cap="none">
+                <a:solidFill>
+                  <a:schemeClr val="tx1"/>
+                </a:solidFill>
+                <a:latin typeface="Helvetica" pitchFamily="34" charset="0"/>
+                <a:cs typeface="Helvetica" pitchFamily="34" charset="0"/>
+              </a:rPr>
+              <a:t>: Корнеев </a:t>
+            </a:r>
+            <a:r>
+              <a:rPr lang="ru-RU" sz="1800" cap="none" dirty="0">
+                <a:solidFill>
+                  <a:schemeClr val="tx1"/>
+                </a:solidFill>
+                <a:latin typeface="Helvetica" pitchFamily="34" charset="0"/>
+                <a:cs typeface="Helvetica" pitchFamily="34" charset="0"/>
+              </a:rPr>
+              <a:t>Н.В</a:t>
             </a:r>
             <a:r>
               <a:rPr lang="ru-RU" sz="1800" dirty="0">
@@ -13887,7 +13907,7 @@
                 <a:latin typeface="Helvetica" panose="020B0604020202020204" pitchFamily="34" charset="0"/>
                 <a:cs typeface="Helvetica" panose="020B0604020202020204" pitchFamily="34" charset="0"/>
               </a:rPr>
-              <a:t>25 </a:t>
+              <a:t>26 </a:t>
             </a:r>
           </a:p>
         </p:txBody>
